--- a/W9/W9S1 - CFGs/W9S1.pptx
+++ b/W9/W9S1 - CFGs/W9S1.pptx
@@ -353,7 +353,7 @@
 <file path=ppt/revisionInfo.xml><?xml version="1.0" encoding="utf-8"?>
 <p1510:revInfo xmlns:a="http://schemas.openxmlformats.org/drawingml/2006/main" xmlns:r="http://schemas.openxmlformats.org/officeDocument/2006/relationships" xmlns:p1510="http://schemas.microsoft.com/office/powerpoint/2015/10/main">
   <p1510:revLst>
-    <p1510:client id="{F43BF9BA-C449-47E4-BEE7-B785B7FFC0A8}" v="1" dt="2026-01-14T08:58:18.069"/>
+    <p1510:client id="{36EB0D5B-F00B-4BCB-84A3-988F9E722471}" v="1" dt="2026-03-17T03:24:26.775"/>
   </p1510:revLst>
 </p1510:revInfo>
 </file>
@@ -363,131 +363,60 @@
   <pc:docChgLst>
     <pc:chgData name="Matthieu De Mari" userId="dfb708c9-d8dc-439f-9a3b-c772bf4a311c" providerId="ADAL" clId="{81E9B007-0C2C-493E-9B93-55A62C9C1F12}"/>
     <pc:docChg chg="undo custSel addSld delSld modSld sldOrd modSection">
-      <pc:chgData name="Matthieu De Mari" userId="dfb708c9-d8dc-439f-9a3b-c772bf4a311c" providerId="ADAL" clId="{81E9B007-0C2C-493E-9B93-55A62C9C1F12}" dt="2026-01-14T09:00:34.845" v="84" actId="20577"/>
+      <pc:chgData name="Matthieu De Mari" userId="dfb708c9-d8dc-439f-9a3b-c772bf4a311c" providerId="ADAL" clId="{81E9B007-0C2C-493E-9B93-55A62C9C1F12}" dt="2026-03-17T04:43:16.687" v="482" actId="47"/>
       <pc:docMkLst>
         <pc:docMk/>
       </pc:docMkLst>
-      <pc:sldChg chg="add del ord">
-        <pc:chgData name="Matthieu De Mari" userId="dfb708c9-d8dc-439f-9a3b-c772bf4a311c" providerId="ADAL" clId="{81E9B007-0C2C-493E-9B93-55A62C9C1F12}" dt="2026-01-14T08:51:26.426" v="36"/>
+      <pc:sldChg chg="modSp mod ord">
+        <pc:chgData name="Matthieu De Mari" userId="dfb708c9-d8dc-439f-9a3b-c772bf4a311c" providerId="ADAL" clId="{81E9B007-0C2C-493E-9B93-55A62C9C1F12}" dt="2026-03-17T03:03:23.929" v="480" actId="20577"/>
         <pc:sldMkLst>
           <pc:docMk/>
-          <pc:sldMk cId="3273590381" sldId="379"/>
-        </pc:sldMkLst>
-      </pc:sldChg>
-      <pc:sldChg chg="modSp add del mod ord">
-        <pc:chgData name="Matthieu De Mari" userId="dfb708c9-d8dc-439f-9a3b-c772bf4a311c" providerId="ADAL" clId="{81E9B007-0C2C-493E-9B93-55A62C9C1F12}" dt="2026-01-14T08:51:39.953" v="56" actId="20577"/>
-        <pc:sldMkLst>
-          <pc:docMk/>
-          <pc:sldMk cId="560452419" sldId="380"/>
+          <pc:sldMk cId="1040156172" sldId="377"/>
         </pc:sldMkLst>
         <pc:spChg chg="mod">
-          <ac:chgData name="Matthieu De Mari" userId="dfb708c9-d8dc-439f-9a3b-c772bf4a311c" providerId="ADAL" clId="{81E9B007-0C2C-493E-9B93-55A62C9C1F12}" dt="2026-01-14T08:51:39.953" v="56" actId="20577"/>
+          <ac:chgData name="Matthieu De Mari" userId="dfb708c9-d8dc-439f-9a3b-c772bf4a311c" providerId="ADAL" clId="{81E9B007-0C2C-493E-9B93-55A62C9C1F12}" dt="2026-03-17T03:03:23.929" v="480" actId="20577"/>
           <ac:spMkLst>
             <pc:docMk/>
-            <pc:sldMk cId="560452419" sldId="380"/>
-            <ac:spMk id="4" creationId="{BAA2BA92-09D0-1523-8566-331B6225090B}"/>
+            <pc:sldMk cId="1040156172" sldId="377"/>
+            <ac:spMk id="2" creationId="{080CEB46-CC16-4D19-8C2C-AEE9471D8168}"/>
           </ac:spMkLst>
         </pc:spChg>
       </pc:sldChg>
-      <pc:sldChg chg="add del ord">
-        <pc:chgData name="Matthieu De Mari" userId="dfb708c9-d8dc-439f-9a3b-c772bf4a311c" providerId="ADAL" clId="{81E9B007-0C2C-493E-9B93-55A62C9C1F12}" dt="2026-01-14T08:51:26.426" v="36"/>
+      <pc:sldChg chg="modSp">
+        <pc:chgData name="Matthieu De Mari" userId="dfb708c9-d8dc-439f-9a3b-c772bf4a311c" providerId="ADAL" clId="{81E9B007-0C2C-493E-9B93-55A62C9C1F12}" dt="2026-03-17T03:24:26.775" v="481" actId="207"/>
         <pc:sldMkLst>
           <pc:docMk/>
-          <pc:sldMk cId="3980915418" sldId="381"/>
-        </pc:sldMkLst>
-      </pc:sldChg>
-      <pc:sldChg chg="add del ord">
-        <pc:chgData name="Matthieu De Mari" userId="dfb708c9-d8dc-439f-9a3b-c772bf4a311c" providerId="ADAL" clId="{81E9B007-0C2C-493E-9B93-55A62C9C1F12}" dt="2026-01-14T08:51:26.426" v="36"/>
-        <pc:sldMkLst>
-          <pc:docMk/>
-          <pc:sldMk cId="173920476" sldId="382"/>
-        </pc:sldMkLst>
-      </pc:sldChg>
-      <pc:sldChg chg="modSp mod">
-        <pc:chgData name="Matthieu De Mari" userId="dfb708c9-d8dc-439f-9a3b-c772bf4a311c" providerId="ADAL" clId="{81E9B007-0C2C-493E-9B93-55A62C9C1F12}" dt="2026-01-14T08:50:10.873" v="32" actId="20577"/>
-        <pc:sldMkLst>
-          <pc:docMk/>
-          <pc:sldMk cId="883898936" sldId="387"/>
+          <pc:sldMk cId="2309302269" sldId="398"/>
         </pc:sldMkLst>
         <pc:spChg chg="mod">
-          <ac:chgData name="Matthieu De Mari" userId="dfb708c9-d8dc-439f-9a3b-c772bf4a311c" providerId="ADAL" clId="{81E9B007-0C2C-493E-9B93-55A62C9C1F12}" dt="2026-01-14T08:50:10.873" v="32" actId="20577"/>
+          <ac:chgData name="Matthieu De Mari" userId="dfb708c9-d8dc-439f-9a3b-c772bf4a311c" providerId="ADAL" clId="{81E9B007-0C2C-493E-9B93-55A62C9C1F12}" dt="2026-03-17T03:24:26.775" v="481" actId="207"/>
           <ac:spMkLst>
             <pc:docMk/>
-            <pc:sldMk cId="883898936" sldId="387"/>
-            <ac:spMk id="6" creationId="{8990E570-B60B-8678-D610-ABA0119C86ED}"/>
+            <pc:sldMk cId="2309302269" sldId="398"/>
+            <ac:spMk id="4" creationId="{BBCCBA20-5235-6A29-4DD0-ED450203C22B}"/>
           </ac:spMkLst>
         </pc:spChg>
       </pc:sldChg>
-      <pc:sldChg chg="add del ord">
-        <pc:chgData name="Matthieu De Mari" userId="dfb708c9-d8dc-439f-9a3b-c772bf4a311c" providerId="ADAL" clId="{81E9B007-0C2C-493E-9B93-55A62C9C1F12}" dt="2026-01-14T08:51:26.426" v="36"/>
+      <pc:sldChg chg="modSp new del mod">
+        <pc:chgData name="Matthieu De Mari" userId="dfb708c9-d8dc-439f-9a3b-c772bf4a311c" providerId="ADAL" clId="{81E9B007-0C2C-493E-9B93-55A62C9C1F12}" dt="2026-03-17T04:43:16.687" v="482" actId="47"/>
         <pc:sldMkLst>
           <pc:docMk/>
-          <pc:sldMk cId="3365691095" sldId="388"/>
-        </pc:sldMkLst>
-      </pc:sldChg>
-      <pc:sldChg chg="add del ord">
-        <pc:chgData name="Matthieu De Mari" userId="dfb708c9-d8dc-439f-9a3b-c772bf4a311c" providerId="ADAL" clId="{81E9B007-0C2C-493E-9B93-55A62C9C1F12}" dt="2026-01-14T08:51:26.426" v="36"/>
-        <pc:sldMkLst>
-          <pc:docMk/>
-          <pc:sldMk cId="833759071" sldId="390"/>
-        </pc:sldMkLst>
-      </pc:sldChg>
-      <pc:sldChg chg="add del ord">
-        <pc:chgData name="Matthieu De Mari" userId="dfb708c9-d8dc-439f-9a3b-c772bf4a311c" providerId="ADAL" clId="{81E9B007-0C2C-493E-9B93-55A62C9C1F12}" dt="2026-01-14T08:51:26.426" v="36"/>
-        <pc:sldMkLst>
-          <pc:docMk/>
-          <pc:sldMk cId="3260263807" sldId="439"/>
-        </pc:sldMkLst>
-      </pc:sldChg>
-      <pc:sldChg chg="modSp mod">
-        <pc:chgData name="Matthieu De Mari" userId="dfb708c9-d8dc-439f-9a3b-c772bf4a311c" providerId="ADAL" clId="{81E9B007-0C2C-493E-9B93-55A62C9C1F12}" dt="2026-01-14T08:58:20.262" v="63" actId="113"/>
-        <pc:sldMkLst>
-          <pc:docMk/>
-          <pc:sldMk cId="860912888" sldId="448"/>
+          <pc:sldMk cId="632796341" sldId="475"/>
         </pc:sldMkLst>
         <pc:spChg chg="mod">
-          <ac:chgData name="Matthieu De Mari" userId="dfb708c9-d8dc-439f-9a3b-c772bf4a311c" providerId="ADAL" clId="{81E9B007-0C2C-493E-9B93-55A62C9C1F12}" dt="2026-01-14T08:58:20.262" v="63" actId="113"/>
+          <ac:chgData name="Matthieu De Mari" userId="dfb708c9-d8dc-439f-9a3b-c772bf4a311c" providerId="ADAL" clId="{81E9B007-0C2C-493E-9B93-55A62C9C1F12}" dt="2026-03-17T03:00:09.113" v="100" actId="20577"/>
           <ac:spMkLst>
             <pc:docMk/>
-            <pc:sldMk cId="860912888" sldId="448"/>
-            <ac:spMk id="3" creationId="{6B2F2664-B4C4-7AEF-F107-55426EA1E7AC}"/>
+            <pc:sldMk cId="632796341" sldId="475"/>
+            <ac:spMk id="2" creationId="{506FAE8A-7B4E-8459-D459-9F4596846D83}"/>
           </ac:spMkLst>
         </pc:spChg>
-      </pc:sldChg>
-      <pc:sldChg chg="del">
-        <pc:chgData name="Matthieu De Mari" userId="dfb708c9-d8dc-439f-9a3b-c772bf4a311c" providerId="ADAL" clId="{81E9B007-0C2C-493E-9B93-55A62C9C1F12}" dt="2026-01-14T08:59:00.745" v="64" actId="47"/>
-        <pc:sldMkLst>
-          <pc:docMk/>
-          <pc:sldMk cId="3552835464" sldId="451"/>
-        </pc:sldMkLst>
-      </pc:sldChg>
-      <pc:sldChg chg="modSp mod">
-        <pc:chgData name="Matthieu De Mari" userId="dfb708c9-d8dc-439f-9a3b-c772bf4a311c" providerId="ADAL" clId="{81E9B007-0C2C-493E-9B93-55A62C9C1F12}" dt="2026-01-14T09:00:21.006" v="82" actId="20577"/>
-        <pc:sldMkLst>
-          <pc:docMk/>
-          <pc:sldMk cId="1877822062" sldId="459"/>
-        </pc:sldMkLst>
         <pc:spChg chg="mod">
-          <ac:chgData name="Matthieu De Mari" userId="dfb708c9-d8dc-439f-9a3b-c772bf4a311c" providerId="ADAL" clId="{81E9B007-0C2C-493E-9B93-55A62C9C1F12}" dt="2026-01-14T09:00:21.006" v="82" actId="20577"/>
+          <ac:chgData name="Matthieu De Mari" userId="dfb708c9-d8dc-439f-9a3b-c772bf4a311c" providerId="ADAL" clId="{81E9B007-0C2C-493E-9B93-55A62C9C1F12}" dt="2026-03-17T03:03:12.476" v="478" actId="20577"/>
           <ac:spMkLst>
             <pc:docMk/>
-            <pc:sldMk cId="1877822062" sldId="459"/>
-            <ac:spMk id="3" creationId="{7A74A958-38BC-5E47-7575-9ECCB116BC1F}"/>
-          </ac:spMkLst>
-        </pc:spChg>
-      </pc:sldChg>
-      <pc:sldChg chg="modSp mod">
-        <pc:chgData name="Matthieu De Mari" userId="dfb708c9-d8dc-439f-9a3b-c772bf4a311c" providerId="ADAL" clId="{81E9B007-0C2C-493E-9B93-55A62C9C1F12}" dt="2026-01-14T09:00:34.845" v="84" actId="20577"/>
-        <pc:sldMkLst>
-          <pc:docMk/>
-          <pc:sldMk cId="2623956437" sldId="460"/>
-        </pc:sldMkLst>
-        <pc:spChg chg="mod">
-          <ac:chgData name="Matthieu De Mari" userId="dfb708c9-d8dc-439f-9a3b-c772bf4a311c" providerId="ADAL" clId="{81E9B007-0C2C-493E-9B93-55A62C9C1F12}" dt="2026-01-14T09:00:34.845" v="84" actId="20577"/>
-          <ac:spMkLst>
-            <pc:docMk/>
-            <pc:sldMk cId="2623956437" sldId="460"/>
-            <ac:spMk id="3" creationId="{7A74A958-38BC-5E47-7575-9ECCB116BC1F}"/>
+            <pc:sldMk cId="632796341" sldId="475"/>
+            <ac:spMk id="3" creationId="{4F132189-4548-A6EC-268C-193499D512C0}"/>
           </ac:spMkLst>
         </pc:spChg>
       </pc:sldChg>
@@ -578,7 +507,7 @@
           <a:p>
             <a:fld id="{98CFC6A4-B085-437B-8084-693BEB2A32DE}" type="datetimeFigureOut">
               <a:rPr lang="en-SG" smtClean="0"/>
-              <a:t>14/1/2026</a:t>
+              <a:t>17/3/2026</a:t>
             </a:fld>
             <a:endParaRPr lang="en-SG"/>
           </a:p>
@@ -995,7 +924,7 @@
           <a:p>
             <a:fld id="{AB35F6B0-D468-4997-9CE3-CF2A1AE5E3F9}" type="datetimeFigureOut">
               <a:rPr lang="en-SG" smtClean="0"/>
-              <a:t>14/1/2026</a:t>
+              <a:t>17/3/2026</a:t>
             </a:fld>
             <a:endParaRPr lang="en-SG"/>
           </a:p>
@@ -1195,7 +1124,7 @@
           <a:p>
             <a:fld id="{AB35F6B0-D468-4997-9CE3-CF2A1AE5E3F9}" type="datetimeFigureOut">
               <a:rPr lang="en-SG" smtClean="0"/>
-              <a:t>14/1/2026</a:t>
+              <a:t>17/3/2026</a:t>
             </a:fld>
             <a:endParaRPr lang="en-SG"/>
           </a:p>
@@ -1405,7 +1334,7 @@
           <a:p>
             <a:fld id="{AB35F6B0-D468-4997-9CE3-CF2A1AE5E3F9}" type="datetimeFigureOut">
               <a:rPr lang="en-SG" smtClean="0"/>
-              <a:t>14/1/2026</a:t>
+              <a:t>17/3/2026</a:t>
             </a:fld>
             <a:endParaRPr lang="en-SG"/>
           </a:p>
@@ -1605,7 +1534,7 @@
           <a:p>
             <a:fld id="{AB35F6B0-D468-4997-9CE3-CF2A1AE5E3F9}" type="datetimeFigureOut">
               <a:rPr lang="en-SG" smtClean="0"/>
-              <a:t>14/1/2026</a:t>
+              <a:t>17/3/2026</a:t>
             </a:fld>
             <a:endParaRPr lang="en-SG"/>
           </a:p>
@@ -1881,7 +1810,7 @@
           <a:p>
             <a:fld id="{AB35F6B0-D468-4997-9CE3-CF2A1AE5E3F9}" type="datetimeFigureOut">
               <a:rPr lang="en-SG" smtClean="0"/>
-              <a:t>14/1/2026</a:t>
+              <a:t>17/3/2026</a:t>
             </a:fld>
             <a:endParaRPr lang="en-SG"/>
           </a:p>
@@ -2149,7 +2078,7 @@
           <a:p>
             <a:fld id="{AB35F6B0-D468-4997-9CE3-CF2A1AE5E3F9}" type="datetimeFigureOut">
               <a:rPr lang="en-SG" smtClean="0"/>
-              <a:t>14/1/2026</a:t>
+              <a:t>17/3/2026</a:t>
             </a:fld>
             <a:endParaRPr lang="en-SG"/>
           </a:p>
@@ -2564,7 +2493,7 @@
           <a:p>
             <a:fld id="{AB35F6B0-D468-4997-9CE3-CF2A1AE5E3F9}" type="datetimeFigureOut">
               <a:rPr lang="en-SG" smtClean="0"/>
-              <a:t>14/1/2026</a:t>
+              <a:t>17/3/2026</a:t>
             </a:fld>
             <a:endParaRPr lang="en-SG"/>
           </a:p>
@@ -2706,7 +2635,7 @@
           <a:p>
             <a:fld id="{AB35F6B0-D468-4997-9CE3-CF2A1AE5E3F9}" type="datetimeFigureOut">
               <a:rPr lang="en-SG" smtClean="0"/>
-              <a:t>14/1/2026</a:t>
+              <a:t>17/3/2026</a:t>
             </a:fld>
             <a:endParaRPr lang="en-SG"/>
           </a:p>
@@ -2819,7 +2748,7 @@
           <a:p>
             <a:fld id="{AB35F6B0-D468-4997-9CE3-CF2A1AE5E3F9}" type="datetimeFigureOut">
               <a:rPr lang="en-SG" smtClean="0"/>
-              <a:t>14/1/2026</a:t>
+              <a:t>17/3/2026</a:t>
             </a:fld>
             <a:endParaRPr lang="en-SG"/>
           </a:p>
@@ -3132,7 +3061,7 @@
           <a:p>
             <a:fld id="{AB35F6B0-D468-4997-9CE3-CF2A1AE5E3F9}" type="datetimeFigureOut">
               <a:rPr lang="en-SG" smtClean="0"/>
-              <a:t>14/1/2026</a:t>
+              <a:t>17/3/2026</a:t>
             </a:fld>
             <a:endParaRPr lang="en-SG"/>
           </a:p>
@@ -3421,7 +3350,7 @@
           <a:p>
             <a:fld id="{AB35F6B0-D468-4997-9CE3-CF2A1AE5E3F9}" type="datetimeFigureOut">
               <a:rPr lang="en-SG" smtClean="0"/>
-              <a:t>14/1/2026</a:t>
+              <a:t>17/3/2026</a:t>
             </a:fld>
             <a:endParaRPr lang="en-SG"/>
           </a:p>
@@ -3664,7 +3593,7 @@
           <a:p>
             <a:fld id="{AB35F6B0-D468-4997-9CE3-CF2A1AE5E3F9}" type="datetimeFigureOut">
               <a:rPr lang="en-SG" smtClean="0"/>
-              <a:t>14/1/2026</a:t>
+              <a:t>17/3/2026</a:t>
             </a:fld>
             <a:endParaRPr lang="en-SG"/>
           </a:p>
@@ -4215,7 +4144,7 @@
             </a:br>
             <a:r>
               <a:rPr lang="en-US" dirty="0"/>
-              <a:t>W9-S3 Context Free Grammars (CFG)</a:t>
+              <a:t>W9-S1 Context Free Grammars (CFG)</a:t>
             </a:r>
             <a:endParaRPr lang="en-GB" dirty="0"/>
           </a:p>
@@ -10453,8 +10382,8 @@
           </a:p>
         </p:txBody>
       </p:sp>
-      <mc:AlternateContent xmlns:mc="http://schemas.openxmlformats.org/markup-compatibility/2006" xmlns:a14="http://schemas.microsoft.com/office/drawing/2010/main">
-        <mc:Choice Requires="a14">
+      <mc:AlternateContent xmlns:mc="http://schemas.openxmlformats.org/markup-compatibility/2006">
+        <mc:Choice xmlns:a14="http://schemas.microsoft.com/office/drawing/2010/main" Requires="a14">
           <p:sp>
             <p:nvSpPr>
               <p:cNvPr id="4" name="Content Placeholder 3">
@@ -11029,7 +10958,7 @@
             </p:txBody>
           </p:sp>
         </mc:Choice>
-        <mc:Fallback xmlns="">
+        <mc:Fallback>
           <p:sp>
             <p:nvSpPr>
               <p:cNvPr id="4" name="Content Placeholder 3">
@@ -11063,7 +10992,7 @@
               <a:lstStyle/>
               <a:p>
                 <a:r>
-                  <a:rPr lang="en-SG">
+                  <a:rPr lang="en-GB">
                     <a:noFill/>
                   </a:rPr>
                   <a:t> </a:t>
